--- a/ppt/IoTAI10-MLP.pptx
+++ b/ppt/IoTAI10-MLP.pptx
@@ -3829,30 +3829,6 @@
           </a:p>
         </p:txBody>
       </p:sp>
-      <p:pic>
-        <p:nvPicPr>
-          <p:cNvPr id="2" name="Image 1"/>
-          <p:cNvPicPr>
-            <a:picLocks noChangeAspect="1"/>
-          </p:cNvPicPr>
-          <p:nvPr/>
-        </p:nvPicPr>
-        <p:blipFill>
-          <a:blip r:embed="rId2"/>
-          <a:stretch>
-            <a:fillRect/>
-          </a:stretch>
-        </p:blipFill>
-        <p:spPr>
-          <a:xfrm>
-            <a:off x="1214437" y="5023445"/>
-            <a:ext cx="6715125" cy="1285875"/>
-          </a:xfrm>
-          <a:prstGeom prst="rect">
-            <a:avLst/>
-          </a:prstGeom>
-        </p:spPr>
-      </p:pic>
       <p:sp>
         <p:nvSpPr>
           <p:cNvPr id="3" name="ZoneTexte 2"/>
@@ -3886,6 +3862,66 @@
           </a:p>
         </p:txBody>
       </p:sp>
+      <p:pic>
+        <p:nvPicPr>
+          <p:cNvPr id="4" name="Image 3">
+            <a:extLst>
+              <a:ext uri="{FF2B5EF4-FFF2-40B4-BE49-F238E27FC236}">
+                <a16:creationId xmlns:a16="http://schemas.microsoft.com/office/drawing/2014/main" id="{1FDDAC18-5CE6-EECA-36F1-F8037D49AE19}"/>
+              </a:ext>
+            </a:extLst>
+          </p:cNvPr>
+          <p:cNvPicPr>
+            <a:picLocks noChangeAspect="1"/>
+          </p:cNvPicPr>
+          <p:nvPr/>
+        </p:nvPicPr>
+        <p:blipFill>
+          <a:blip r:embed="rId2"/>
+          <a:stretch>
+            <a:fillRect/>
+          </a:stretch>
+        </p:blipFill>
+        <p:spPr>
+          <a:xfrm>
+            <a:off x="0" y="-25963"/>
+            <a:ext cx="2911454" cy="3131705"/>
+          </a:xfrm>
+          <a:prstGeom prst="rect">
+            <a:avLst/>
+          </a:prstGeom>
+        </p:spPr>
+      </p:pic>
+      <p:pic>
+        <p:nvPicPr>
+          <p:cNvPr id="5" name="Image 4">
+            <a:extLst>
+              <a:ext uri="{FF2B5EF4-FFF2-40B4-BE49-F238E27FC236}">
+                <a16:creationId xmlns:a16="http://schemas.microsoft.com/office/drawing/2014/main" id="{253E907F-77F7-8EA1-D7C4-5687E8ED5D97}"/>
+              </a:ext>
+            </a:extLst>
+          </p:cNvPr>
+          <p:cNvPicPr>
+            <a:picLocks noChangeAspect="1"/>
+          </p:cNvPicPr>
+          <p:nvPr/>
+        </p:nvPicPr>
+        <p:blipFill>
+          <a:blip r:embed="rId3"/>
+          <a:stretch>
+            <a:fillRect/>
+          </a:stretch>
+        </p:blipFill>
+        <p:spPr>
+          <a:xfrm>
+            <a:off x="2500023" y="4653136"/>
+            <a:ext cx="4143953" cy="1247949"/>
+          </a:xfrm>
+          <a:prstGeom prst="rect">
+            <a:avLst/>
+          </a:prstGeom>
+        </p:spPr>
+      </p:pic>
     </p:spTree>
   </p:cSld>
   <p:clrMapOvr>
